--- a/中越詩歌/康熙十架詩_Bài Ca Thập Tự của Vua Khang Hy.pptx
+++ b/中越詩歌/康熙十架詩_Bài Ca Thập Tự của Vua Khang Hy.pptx
@@ -5,15 +5,15 @@
     <p:sldMasterId id="2147483660" r:id="rId1"/>
   </p:sldMasterIdLst>
   <p:sldIdLst>
-    <p:sldId id="257" r:id="rId2"/>
-    <p:sldId id="258" r:id="rId3"/>
-    <p:sldId id="259" r:id="rId4"/>
-    <p:sldId id="260" r:id="rId5"/>
-    <p:sldId id="261" r:id="rId6"/>
-    <p:sldId id="262" r:id="rId7"/>
-    <p:sldId id="263" r:id="rId8"/>
-    <p:sldId id="264" r:id="rId9"/>
-    <p:sldId id="265" r:id="rId10"/>
+    <p:sldId id="644" r:id="rId2"/>
+    <p:sldId id="645" r:id="rId3"/>
+    <p:sldId id="646" r:id="rId4"/>
+    <p:sldId id="647" r:id="rId5"/>
+    <p:sldId id="648" r:id="rId6"/>
+    <p:sldId id="649" r:id="rId7"/>
+    <p:sldId id="650" r:id="rId8"/>
+    <p:sldId id="651" r:id="rId9"/>
+    <p:sldId id="652" r:id="rId10"/>
   </p:sldIdLst>
   <p:sldSz cx="12192000" cy="6858000"/>
   <p:notesSz cx="6858000" cy="9144000"/>
@@ -112,6 +112,11 @@
       </a:defRPr>
     </a:lvl9pPr>
   </p:defaultTextStyle>
+  <p:extLst>
+    <p:ext uri="{EFAFB233-063F-42B5-8137-9DF3F51BA10A}">
+      <p15:sldGuideLst xmlns:p15="http://schemas.microsoft.com/office/powerpoint/2012/main"/>
+    </p:ext>
+  </p:extLst>
 </p:presentation>
 </file>
 
@@ -153,7 +158,7 @@
           <a:lstStyle/>
           <a:p>
             <a:r>
-              <a:rPr lang="en-US" altLang="zh-TW" smtClean="0"/>
+              <a:rPr lang="en-US" altLang="zh-TW"/>
               <a:t>Click to edit Master title style</a:t>
             </a:r>
             <a:endParaRPr lang="zh-TW" altLang="en-US"/>
@@ -272,7 +277,7 @@
           </a:lstStyle>
           <a:p>
             <a:r>
-              <a:rPr lang="en-US" altLang="zh-TW" smtClean="0"/>
+              <a:rPr lang="en-US" altLang="zh-TW"/>
               <a:t>Click to edit Master subtitle style</a:t>
             </a:r>
             <a:endParaRPr lang="zh-TW" altLang="en-US"/>
@@ -296,7 +301,7 @@
           <a:p>
             <a:fld id="{FF09ADC4-85FD-44C3-B583-323D4898BB9C}" type="datetimeFigureOut">
               <a:rPr lang="en-US" smtClean="0"/>
-              <a:t>4/7/2023</a:t>
+              <a:t>3/26/2024</a:t>
             </a:fld>
             <a:endParaRPr lang="en-US"/>
           </a:p>
@@ -390,7 +395,7 @@
           <a:lstStyle/>
           <a:p>
             <a:r>
-              <a:rPr lang="en-US" altLang="zh-TW" smtClean="0"/>
+              <a:rPr lang="en-US" altLang="zh-TW"/>
               <a:t>Click to edit Master title style</a:t>
             </a:r>
             <a:endParaRPr lang="zh-TW" altLang="en-US"/>
@@ -414,35 +419,35 @@
           <a:p>
             <a:pPr lvl="0"/>
             <a:r>
-              <a:rPr lang="en-US" altLang="zh-TW" smtClean="0"/>
+              <a:rPr lang="en-US" altLang="zh-TW"/>
               <a:t>Edit Master text styles</a:t>
             </a:r>
           </a:p>
           <a:p>
             <a:pPr lvl="1"/>
             <a:r>
-              <a:rPr lang="en-US" altLang="zh-TW" smtClean="0"/>
+              <a:rPr lang="en-US" altLang="zh-TW"/>
               <a:t>Second level</a:t>
             </a:r>
           </a:p>
           <a:p>
             <a:pPr lvl="2"/>
             <a:r>
-              <a:rPr lang="en-US" altLang="zh-TW" smtClean="0"/>
+              <a:rPr lang="en-US" altLang="zh-TW"/>
               <a:t>Third level</a:t>
             </a:r>
           </a:p>
           <a:p>
             <a:pPr lvl="3"/>
             <a:r>
-              <a:rPr lang="en-US" altLang="zh-TW" smtClean="0"/>
+              <a:rPr lang="en-US" altLang="zh-TW"/>
               <a:t>Fourth level</a:t>
             </a:r>
           </a:p>
           <a:p>
             <a:pPr lvl="4"/>
             <a:r>
-              <a:rPr lang="en-US" altLang="zh-TW" smtClean="0"/>
+              <a:rPr lang="en-US" altLang="zh-TW"/>
               <a:t>Fifth level</a:t>
             </a:r>
             <a:endParaRPr lang="zh-TW" altLang="en-US"/>
@@ -466,7 +471,7 @@
           <a:p>
             <a:fld id="{FF09ADC4-85FD-44C3-B583-323D4898BB9C}" type="datetimeFigureOut">
               <a:rPr lang="en-US" smtClean="0"/>
-              <a:t>4/7/2023</a:t>
+              <a:t>3/26/2024</a:t>
             </a:fld>
             <a:endParaRPr lang="en-US"/>
           </a:p>
@@ -565,7 +570,7 @@
           <a:lstStyle/>
           <a:p>
             <a:r>
-              <a:rPr lang="en-US" altLang="zh-TW" smtClean="0"/>
+              <a:rPr lang="en-US" altLang="zh-TW"/>
               <a:t>Click to edit Master title style</a:t>
             </a:r>
             <a:endParaRPr lang="zh-TW" altLang="en-US"/>
@@ -594,35 +599,35 @@
           <a:p>
             <a:pPr lvl="0"/>
             <a:r>
-              <a:rPr lang="en-US" altLang="zh-TW" smtClean="0"/>
+              <a:rPr lang="en-US" altLang="zh-TW"/>
               <a:t>Edit Master text styles</a:t>
             </a:r>
           </a:p>
           <a:p>
             <a:pPr lvl="1"/>
             <a:r>
-              <a:rPr lang="en-US" altLang="zh-TW" smtClean="0"/>
+              <a:rPr lang="en-US" altLang="zh-TW"/>
               <a:t>Second level</a:t>
             </a:r>
           </a:p>
           <a:p>
             <a:pPr lvl="2"/>
             <a:r>
-              <a:rPr lang="en-US" altLang="zh-TW" smtClean="0"/>
+              <a:rPr lang="en-US" altLang="zh-TW"/>
               <a:t>Third level</a:t>
             </a:r>
           </a:p>
           <a:p>
             <a:pPr lvl="3"/>
             <a:r>
-              <a:rPr lang="en-US" altLang="zh-TW" smtClean="0"/>
+              <a:rPr lang="en-US" altLang="zh-TW"/>
               <a:t>Fourth level</a:t>
             </a:r>
           </a:p>
           <a:p>
             <a:pPr lvl="4"/>
             <a:r>
-              <a:rPr lang="en-US" altLang="zh-TW" smtClean="0"/>
+              <a:rPr lang="en-US" altLang="zh-TW"/>
               <a:t>Fifth level</a:t>
             </a:r>
             <a:endParaRPr lang="zh-TW" altLang="en-US"/>
@@ -646,7 +651,7 @@
           <a:p>
             <a:fld id="{FF09ADC4-85FD-44C3-B583-323D4898BB9C}" type="datetimeFigureOut">
               <a:rPr lang="en-US" smtClean="0"/>
-              <a:t>4/7/2023</a:t>
+              <a:t>3/26/2024</a:t>
             </a:fld>
             <a:endParaRPr lang="en-US"/>
           </a:p>
@@ -740,7 +745,7 @@
           <a:lstStyle/>
           <a:p>
             <a:r>
-              <a:rPr lang="en-US" altLang="zh-TW" smtClean="0"/>
+              <a:rPr lang="en-US" altLang="zh-TW"/>
               <a:t>Click to edit Master title style</a:t>
             </a:r>
             <a:endParaRPr lang="zh-TW" altLang="en-US"/>
@@ -764,35 +769,35 @@
           <a:p>
             <a:pPr lvl="0"/>
             <a:r>
-              <a:rPr lang="en-US" altLang="zh-TW" smtClean="0"/>
+              <a:rPr lang="en-US" altLang="zh-TW"/>
               <a:t>Edit Master text styles</a:t>
             </a:r>
           </a:p>
           <a:p>
             <a:pPr lvl="1"/>
             <a:r>
-              <a:rPr lang="en-US" altLang="zh-TW" smtClean="0"/>
+              <a:rPr lang="en-US" altLang="zh-TW"/>
               <a:t>Second level</a:t>
             </a:r>
           </a:p>
           <a:p>
             <a:pPr lvl="2"/>
             <a:r>
-              <a:rPr lang="en-US" altLang="zh-TW" smtClean="0"/>
+              <a:rPr lang="en-US" altLang="zh-TW"/>
               <a:t>Third level</a:t>
             </a:r>
           </a:p>
           <a:p>
             <a:pPr lvl="3"/>
             <a:r>
-              <a:rPr lang="en-US" altLang="zh-TW" smtClean="0"/>
+              <a:rPr lang="en-US" altLang="zh-TW"/>
               <a:t>Fourth level</a:t>
             </a:r>
           </a:p>
           <a:p>
             <a:pPr lvl="4"/>
             <a:r>
-              <a:rPr lang="en-US" altLang="zh-TW" smtClean="0"/>
+              <a:rPr lang="en-US" altLang="zh-TW"/>
               <a:t>Fifth level</a:t>
             </a:r>
             <a:endParaRPr lang="zh-TW" altLang="en-US"/>
@@ -816,7 +821,7 @@
           <a:p>
             <a:fld id="{FF09ADC4-85FD-44C3-B583-323D4898BB9C}" type="datetimeFigureOut">
               <a:rPr lang="en-US" smtClean="0"/>
-              <a:t>4/7/2023</a:t>
+              <a:t>3/26/2024</a:t>
             </a:fld>
             <a:endParaRPr lang="en-US"/>
           </a:p>
@@ -919,7 +924,7 @@
           </a:lstStyle>
           <a:p>
             <a:r>
-              <a:rPr lang="en-US" altLang="zh-TW" smtClean="0"/>
+              <a:rPr lang="en-US" altLang="zh-TW"/>
               <a:t>Click to edit Master title style</a:t>
             </a:r>
             <a:endParaRPr lang="zh-TW" altLang="en-US"/>
@@ -1039,7 +1044,7 @@
           <a:p>
             <a:pPr lvl="0"/>
             <a:r>
-              <a:rPr lang="en-US" altLang="zh-TW" smtClean="0"/>
+              <a:rPr lang="en-US" altLang="zh-TW"/>
               <a:t>Edit Master text styles</a:t>
             </a:r>
           </a:p>
@@ -1062,7 +1067,7 @@
           <a:p>
             <a:fld id="{FF09ADC4-85FD-44C3-B583-323D4898BB9C}" type="datetimeFigureOut">
               <a:rPr lang="en-US" smtClean="0"/>
-              <a:t>4/7/2023</a:t>
+              <a:t>3/26/2024</a:t>
             </a:fld>
             <a:endParaRPr lang="en-US"/>
           </a:p>
@@ -1156,7 +1161,7 @@
           <a:lstStyle/>
           <a:p>
             <a:r>
-              <a:rPr lang="en-US" altLang="zh-TW" smtClean="0"/>
+              <a:rPr lang="en-US" altLang="zh-TW"/>
               <a:t>Click to edit Master title style</a:t>
             </a:r>
             <a:endParaRPr lang="zh-TW" altLang="en-US"/>
@@ -1213,35 +1218,35 @@
           <a:p>
             <a:pPr lvl="0"/>
             <a:r>
-              <a:rPr lang="en-US" altLang="zh-TW" smtClean="0"/>
+              <a:rPr lang="en-US" altLang="zh-TW"/>
               <a:t>Edit Master text styles</a:t>
             </a:r>
           </a:p>
           <a:p>
             <a:pPr lvl="1"/>
             <a:r>
-              <a:rPr lang="en-US" altLang="zh-TW" smtClean="0"/>
+              <a:rPr lang="en-US" altLang="zh-TW"/>
               <a:t>Second level</a:t>
             </a:r>
           </a:p>
           <a:p>
             <a:pPr lvl="2"/>
             <a:r>
-              <a:rPr lang="en-US" altLang="zh-TW" smtClean="0"/>
+              <a:rPr lang="en-US" altLang="zh-TW"/>
               <a:t>Third level</a:t>
             </a:r>
           </a:p>
           <a:p>
             <a:pPr lvl="3"/>
             <a:r>
-              <a:rPr lang="en-US" altLang="zh-TW" smtClean="0"/>
+              <a:rPr lang="en-US" altLang="zh-TW"/>
               <a:t>Fourth level</a:t>
             </a:r>
           </a:p>
           <a:p>
             <a:pPr lvl="4"/>
             <a:r>
-              <a:rPr lang="en-US" altLang="zh-TW" smtClean="0"/>
+              <a:rPr lang="en-US" altLang="zh-TW"/>
               <a:t>Fifth level</a:t>
             </a:r>
             <a:endParaRPr lang="zh-TW" altLang="en-US"/>
@@ -1298,35 +1303,35 @@
           <a:p>
             <a:pPr lvl="0"/>
             <a:r>
-              <a:rPr lang="en-US" altLang="zh-TW" smtClean="0"/>
+              <a:rPr lang="en-US" altLang="zh-TW"/>
               <a:t>Edit Master text styles</a:t>
             </a:r>
           </a:p>
           <a:p>
             <a:pPr lvl="1"/>
             <a:r>
-              <a:rPr lang="en-US" altLang="zh-TW" smtClean="0"/>
+              <a:rPr lang="en-US" altLang="zh-TW"/>
               <a:t>Second level</a:t>
             </a:r>
           </a:p>
           <a:p>
             <a:pPr lvl="2"/>
             <a:r>
-              <a:rPr lang="en-US" altLang="zh-TW" smtClean="0"/>
+              <a:rPr lang="en-US" altLang="zh-TW"/>
               <a:t>Third level</a:t>
             </a:r>
           </a:p>
           <a:p>
             <a:pPr lvl="3"/>
             <a:r>
-              <a:rPr lang="en-US" altLang="zh-TW" smtClean="0"/>
+              <a:rPr lang="en-US" altLang="zh-TW"/>
               <a:t>Fourth level</a:t>
             </a:r>
           </a:p>
           <a:p>
             <a:pPr lvl="4"/>
             <a:r>
-              <a:rPr lang="en-US" altLang="zh-TW" smtClean="0"/>
+              <a:rPr lang="en-US" altLang="zh-TW"/>
               <a:t>Fifth level</a:t>
             </a:r>
             <a:endParaRPr lang="zh-TW" altLang="en-US"/>
@@ -1350,7 +1355,7 @@
           <a:p>
             <a:fld id="{FF09ADC4-85FD-44C3-B583-323D4898BB9C}" type="datetimeFigureOut">
               <a:rPr lang="en-US" smtClean="0"/>
-              <a:t>4/7/2023</a:t>
+              <a:t>3/26/2024</a:t>
             </a:fld>
             <a:endParaRPr lang="en-US"/>
           </a:p>
@@ -1448,7 +1453,7 @@
           </a:lstStyle>
           <a:p>
             <a:r>
-              <a:rPr lang="en-US" altLang="zh-TW" smtClean="0"/>
+              <a:rPr lang="en-US" altLang="zh-TW"/>
               <a:t>Click to edit Master title style</a:t>
             </a:r>
             <a:endParaRPr lang="zh-TW" altLang="en-US"/>
@@ -1514,7 +1519,7 @@
           <a:p>
             <a:pPr lvl="0"/>
             <a:r>
-              <a:rPr lang="en-US" altLang="zh-TW" smtClean="0"/>
+              <a:rPr lang="en-US" altLang="zh-TW"/>
               <a:t>Edit Master text styles</a:t>
             </a:r>
           </a:p>
@@ -1570,35 +1575,35 @@
           <a:p>
             <a:pPr lvl="0"/>
             <a:r>
-              <a:rPr lang="en-US" altLang="zh-TW" smtClean="0"/>
+              <a:rPr lang="en-US" altLang="zh-TW"/>
               <a:t>Edit Master text styles</a:t>
             </a:r>
           </a:p>
           <a:p>
             <a:pPr lvl="1"/>
             <a:r>
-              <a:rPr lang="en-US" altLang="zh-TW" smtClean="0"/>
+              <a:rPr lang="en-US" altLang="zh-TW"/>
               <a:t>Second level</a:t>
             </a:r>
           </a:p>
           <a:p>
             <a:pPr lvl="2"/>
             <a:r>
-              <a:rPr lang="en-US" altLang="zh-TW" smtClean="0"/>
+              <a:rPr lang="en-US" altLang="zh-TW"/>
               <a:t>Third level</a:t>
             </a:r>
           </a:p>
           <a:p>
             <a:pPr lvl="3"/>
             <a:r>
-              <a:rPr lang="en-US" altLang="zh-TW" smtClean="0"/>
+              <a:rPr lang="en-US" altLang="zh-TW"/>
               <a:t>Fourth level</a:t>
             </a:r>
           </a:p>
           <a:p>
             <a:pPr lvl="4"/>
             <a:r>
-              <a:rPr lang="en-US" altLang="zh-TW" smtClean="0"/>
+              <a:rPr lang="en-US" altLang="zh-TW"/>
               <a:t>Fifth level</a:t>
             </a:r>
             <a:endParaRPr lang="zh-TW" altLang="en-US"/>
@@ -1664,7 +1669,7 @@
           <a:p>
             <a:pPr lvl="0"/>
             <a:r>
-              <a:rPr lang="en-US" altLang="zh-TW" smtClean="0"/>
+              <a:rPr lang="en-US" altLang="zh-TW"/>
               <a:t>Edit Master text styles</a:t>
             </a:r>
           </a:p>
@@ -1720,35 +1725,35 @@
           <a:p>
             <a:pPr lvl="0"/>
             <a:r>
-              <a:rPr lang="en-US" altLang="zh-TW" smtClean="0"/>
+              <a:rPr lang="en-US" altLang="zh-TW"/>
               <a:t>Edit Master text styles</a:t>
             </a:r>
           </a:p>
           <a:p>
             <a:pPr lvl="1"/>
             <a:r>
-              <a:rPr lang="en-US" altLang="zh-TW" smtClean="0"/>
+              <a:rPr lang="en-US" altLang="zh-TW"/>
               <a:t>Second level</a:t>
             </a:r>
           </a:p>
           <a:p>
             <a:pPr lvl="2"/>
             <a:r>
-              <a:rPr lang="en-US" altLang="zh-TW" smtClean="0"/>
+              <a:rPr lang="en-US" altLang="zh-TW"/>
               <a:t>Third level</a:t>
             </a:r>
           </a:p>
           <a:p>
             <a:pPr lvl="3"/>
             <a:r>
-              <a:rPr lang="en-US" altLang="zh-TW" smtClean="0"/>
+              <a:rPr lang="en-US" altLang="zh-TW"/>
               <a:t>Fourth level</a:t>
             </a:r>
           </a:p>
           <a:p>
             <a:pPr lvl="4"/>
             <a:r>
-              <a:rPr lang="en-US" altLang="zh-TW" smtClean="0"/>
+              <a:rPr lang="en-US" altLang="zh-TW"/>
               <a:t>Fifth level</a:t>
             </a:r>
             <a:endParaRPr lang="zh-TW" altLang="en-US"/>
@@ -1772,7 +1777,7 @@
           <a:p>
             <a:fld id="{FF09ADC4-85FD-44C3-B583-323D4898BB9C}" type="datetimeFigureOut">
               <a:rPr lang="en-US" smtClean="0"/>
-              <a:t>4/7/2023</a:t>
+              <a:t>3/26/2024</a:t>
             </a:fld>
             <a:endParaRPr lang="en-US"/>
           </a:p>
@@ -1866,7 +1871,7 @@
           <a:lstStyle/>
           <a:p>
             <a:r>
-              <a:rPr lang="en-US" altLang="zh-TW" smtClean="0"/>
+              <a:rPr lang="en-US" altLang="zh-TW"/>
               <a:t>Click to edit Master title style</a:t>
             </a:r>
             <a:endParaRPr lang="zh-TW" altLang="en-US"/>
@@ -1890,7 +1895,7 @@
           <a:p>
             <a:fld id="{FF09ADC4-85FD-44C3-B583-323D4898BB9C}" type="datetimeFigureOut">
               <a:rPr lang="en-US" smtClean="0"/>
-              <a:t>4/7/2023</a:t>
+              <a:t>3/26/2024</a:t>
             </a:fld>
             <a:endParaRPr lang="en-US"/>
           </a:p>
@@ -1985,7 +1990,7 @@
           <a:p>
             <a:fld id="{FF09ADC4-85FD-44C3-B583-323D4898BB9C}" type="datetimeFigureOut">
               <a:rPr lang="en-US" smtClean="0"/>
-              <a:t>4/7/2023</a:t>
+              <a:t>3/26/2024</a:t>
             </a:fld>
             <a:endParaRPr lang="en-US"/>
           </a:p>
@@ -2088,7 +2093,7 @@
           </a:lstStyle>
           <a:p>
             <a:r>
-              <a:rPr lang="en-US" altLang="zh-TW" smtClean="0"/>
+              <a:rPr lang="en-US" altLang="zh-TW"/>
               <a:t>Click to edit Master title style</a:t>
             </a:r>
             <a:endParaRPr lang="zh-TW" altLang="en-US"/>
@@ -2145,35 +2150,35 @@
           <a:p>
             <a:pPr lvl="0"/>
             <a:r>
-              <a:rPr lang="en-US" altLang="zh-TW" smtClean="0"/>
+              <a:rPr lang="en-US" altLang="zh-TW"/>
               <a:t>Edit Master text styles</a:t>
             </a:r>
           </a:p>
           <a:p>
             <a:pPr lvl="1"/>
             <a:r>
-              <a:rPr lang="en-US" altLang="zh-TW" smtClean="0"/>
+              <a:rPr lang="en-US" altLang="zh-TW"/>
               <a:t>Second level</a:t>
             </a:r>
           </a:p>
           <a:p>
             <a:pPr lvl="2"/>
             <a:r>
-              <a:rPr lang="en-US" altLang="zh-TW" smtClean="0"/>
+              <a:rPr lang="en-US" altLang="zh-TW"/>
               <a:t>Third level</a:t>
             </a:r>
           </a:p>
           <a:p>
             <a:pPr lvl="3"/>
             <a:r>
-              <a:rPr lang="en-US" altLang="zh-TW" smtClean="0"/>
+              <a:rPr lang="en-US" altLang="zh-TW"/>
               <a:t>Fourth level</a:t>
             </a:r>
           </a:p>
           <a:p>
             <a:pPr lvl="4"/>
             <a:r>
-              <a:rPr lang="en-US" altLang="zh-TW" smtClean="0"/>
+              <a:rPr lang="en-US" altLang="zh-TW"/>
               <a:t>Fifth level</a:t>
             </a:r>
             <a:endParaRPr lang="zh-TW" altLang="en-US"/>
@@ -2239,7 +2244,7 @@
           <a:p>
             <a:pPr lvl="0"/>
             <a:r>
-              <a:rPr lang="en-US" altLang="zh-TW" smtClean="0"/>
+              <a:rPr lang="en-US" altLang="zh-TW"/>
               <a:t>Edit Master text styles</a:t>
             </a:r>
           </a:p>
@@ -2262,7 +2267,7 @@
           <a:p>
             <a:fld id="{FF09ADC4-85FD-44C3-B583-323D4898BB9C}" type="datetimeFigureOut">
               <a:rPr lang="en-US" smtClean="0"/>
-              <a:t>4/7/2023</a:t>
+              <a:t>3/26/2024</a:t>
             </a:fld>
             <a:endParaRPr lang="en-US"/>
           </a:p>
@@ -2365,7 +2370,7 @@
           </a:lstStyle>
           <a:p>
             <a:r>
-              <a:rPr lang="en-US" altLang="zh-TW" smtClean="0"/>
+              <a:rPr lang="en-US" altLang="zh-TW"/>
               <a:t>Click to edit Master title style</a:t>
             </a:r>
             <a:endParaRPr lang="zh-TW" altLang="en-US"/>
@@ -2430,7 +2435,7 @@
           </a:lstStyle>
           <a:p>
             <a:r>
-              <a:rPr lang="en-US" altLang="zh-TW" smtClean="0"/>
+              <a:rPr lang="en-US" altLang="zh-TW"/>
               <a:t>Click icon to add picture</a:t>
             </a:r>
             <a:endParaRPr lang="zh-TW" altLang="en-US"/>
@@ -2496,7 +2501,7 @@
           <a:p>
             <a:pPr lvl="0"/>
             <a:r>
-              <a:rPr lang="en-US" altLang="zh-TW" smtClean="0"/>
+              <a:rPr lang="en-US" altLang="zh-TW"/>
               <a:t>Edit Master text styles</a:t>
             </a:r>
           </a:p>
@@ -2519,7 +2524,7 @@
           <a:p>
             <a:fld id="{FF09ADC4-85FD-44C3-B583-323D4898BB9C}" type="datetimeFigureOut">
               <a:rPr lang="en-US" smtClean="0"/>
-              <a:t>4/7/2023</a:t>
+              <a:t>3/26/2024</a:t>
             </a:fld>
             <a:endParaRPr lang="en-US"/>
           </a:p>
@@ -2633,10 +2638,9 @@
           <a:lstStyle/>
           <a:p>
             <a:r>
-              <a:rPr lang="zh-TW" altLang="en-US" smtClean="0"/>
+              <a:rPr lang="zh-TW" altLang="en-US"/>
               <a:t>按一下以編輯母片標題樣式</a:t>
             </a:r>
-            <a:endParaRPr lang="zh-TW" altLang="en-US"/>
           </a:p>
         </p:txBody>
       </p:sp>
@@ -2667,38 +2671,37 @@
           <a:p>
             <a:pPr lvl="0"/>
             <a:r>
-              <a:rPr lang="zh-TW" altLang="en-US" smtClean="0"/>
+              <a:rPr lang="zh-TW" altLang="en-US"/>
               <a:t>按一下以編輯母片文字樣式</a:t>
             </a:r>
           </a:p>
           <a:p>
             <a:pPr lvl="1"/>
             <a:r>
-              <a:rPr lang="zh-TW" altLang="en-US" smtClean="0"/>
+              <a:rPr lang="zh-TW" altLang="en-US"/>
               <a:t>第二層</a:t>
             </a:r>
           </a:p>
           <a:p>
             <a:pPr lvl="2"/>
             <a:r>
-              <a:rPr lang="zh-TW" altLang="en-US" smtClean="0"/>
+              <a:rPr lang="zh-TW" altLang="en-US"/>
               <a:t>第三層</a:t>
             </a:r>
           </a:p>
           <a:p>
             <a:pPr lvl="3"/>
             <a:r>
-              <a:rPr lang="zh-TW" altLang="en-US" smtClean="0"/>
+              <a:rPr lang="zh-TW" altLang="en-US"/>
               <a:t>第四層</a:t>
             </a:r>
           </a:p>
           <a:p>
             <a:pPr lvl="4"/>
             <a:r>
-              <a:rPr lang="zh-TW" altLang="en-US" smtClean="0"/>
+              <a:rPr lang="zh-TW" altLang="en-US"/>
               <a:t>第五層</a:t>
             </a:r>
-            <a:endParaRPr lang="zh-TW" altLang="en-US"/>
           </a:p>
         </p:txBody>
       </p:sp>
@@ -2737,7 +2740,7 @@
           <a:p>
             <a:fld id="{FF09ADC4-85FD-44C3-B583-323D4898BB9C}" type="datetimeFigureOut">
               <a:rPr lang="en-US" smtClean="0"/>
-              <a:t>4/7/2023</a:t>
+              <a:t>3/26/2024</a:t>
             </a:fld>
             <a:endParaRPr lang="en-US"/>
           </a:p>
@@ -3124,7 +3127,7 @@
         </p:nvSpPr>
         <p:spPr>
           <a:xfrm>
-            <a:off x="0" y="2299173"/>
+            <a:off x="-2048" y="2203163"/>
             <a:ext cx="12192000" cy="1143000"/>
           </a:xfrm>
         </p:spPr>
@@ -3164,7 +3167,7 @@
         </p:nvSpPr>
         <p:spPr>
           <a:xfrm>
-            <a:off x="2048" y="3236979"/>
+            <a:off x="0" y="3140968"/>
             <a:ext cx="12192000" cy="1143000"/>
           </a:xfrm>
           <a:prstGeom prst="rect">
@@ -3226,7 +3229,7 @@
                 <a:ea typeface="微軟正黑體" pitchFamily="34" charset="-120"/>
                 <a:cs typeface="Calibri" panose="020F0502020204030204" pitchFamily="34" charset="0"/>
               </a:rPr>
-              <a:t> Ca </a:t>
+              <a:t> ca </a:t>
             </a:r>
             <a:r>
               <a:rPr lang="en-US" sz="5400" b="1" i="1" dirty="0" err="1">
@@ -3265,7 +3268,7 @@
               <a:t> </a:t>
             </a:r>
             <a:r>
-              <a:rPr lang="en-US" sz="5400" b="1" i="1" dirty="0" err="1" smtClean="0">
+              <a:rPr lang="en-US" sz="5400" b="1" i="1" dirty="0" err="1">
                 <a:solidFill>
                   <a:srgbClr val="660033"/>
                 </a:solidFill>
@@ -3283,7 +3286,7 @@
               <a:t>Tự</a:t>
             </a:r>
             <a:r>
-              <a:rPr lang="en-US" sz="5400" b="1" i="1" dirty="0" smtClean="0">
+              <a:rPr lang="en-US" sz="5400" b="1" i="1" dirty="0">
                 <a:solidFill>
                   <a:srgbClr val="660033"/>
                 </a:solidFill>
@@ -3352,7 +3355,7 @@
                 <a:ea typeface="微軟正黑體" pitchFamily="34" charset="-120"/>
                 <a:cs typeface="Calibri" panose="020F0502020204030204" pitchFamily="34" charset="0"/>
               </a:rPr>
-              <a:t>Vua</a:t>
+              <a:t>vua</a:t>
             </a:r>
             <a:r>
               <a:rPr lang="en-US" sz="5400" b="1" i="1" dirty="0">
@@ -3370,61 +3373,7 @@
                 <a:ea typeface="微軟正黑體" pitchFamily="34" charset="-120"/>
                 <a:cs typeface="Calibri" panose="020F0502020204030204" pitchFamily="34" charset="0"/>
               </a:rPr>
-              <a:t> </a:t>
-            </a:r>
-            <a:r>
-              <a:rPr lang="en-US" sz="5400" b="1" i="1" dirty="0" err="1">
-                <a:solidFill>
-                  <a:srgbClr val="660033"/>
-                </a:solidFill>
-                <a:effectLst>
-                  <a:outerShdw blurRad="38100" dist="38100" dir="2700000" algn="tl">
-                    <a:srgbClr val="000000">
-                      <a:alpha val="43137"/>
-                    </a:srgbClr>
-                  </a:outerShdw>
-                </a:effectLst>
-                <a:latin typeface="Calibri" panose="020F0502020204030204" pitchFamily="34" charset="0"/>
-                <a:ea typeface="微軟正黑體" pitchFamily="34" charset="-120"/>
-                <a:cs typeface="Calibri" panose="020F0502020204030204" pitchFamily="34" charset="0"/>
-              </a:rPr>
-              <a:t>Khang</a:t>
-            </a:r>
-            <a:r>
-              <a:rPr lang="en-US" sz="5400" b="1" i="1" dirty="0">
-                <a:solidFill>
-                  <a:srgbClr val="660033"/>
-                </a:solidFill>
-                <a:effectLst>
-                  <a:outerShdw blurRad="38100" dist="38100" dir="2700000" algn="tl">
-                    <a:srgbClr val="000000">
-                      <a:alpha val="43137"/>
-                    </a:srgbClr>
-                  </a:outerShdw>
-                </a:effectLst>
-                <a:latin typeface="Calibri" panose="020F0502020204030204" pitchFamily="34" charset="0"/>
-                <a:ea typeface="微軟正黑體" pitchFamily="34" charset="-120"/>
-                <a:cs typeface="Calibri" panose="020F0502020204030204" pitchFamily="34" charset="0"/>
-              </a:rPr>
-              <a:t> </a:t>
-            </a:r>
-            <a:r>
-              <a:rPr lang="en-US" sz="5400" b="1" i="1" dirty="0" err="1">
-                <a:solidFill>
-                  <a:srgbClr val="660033"/>
-                </a:solidFill>
-                <a:effectLst>
-                  <a:outerShdw blurRad="38100" dist="38100" dir="2700000" algn="tl">
-                    <a:srgbClr val="000000">
-                      <a:alpha val="43137"/>
-                    </a:srgbClr>
-                  </a:outerShdw>
-                </a:effectLst>
-                <a:latin typeface="Calibri" panose="020F0502020204030204" pitchFamily="34" charset="0"/>
-                <a:ea typeface="微軟正黑體" pitchFamily="34" charset="-120"/>
-                <a:cs typeface="Calibri" panose="020F0502020204030204" pitchFamily="34" charset="0"/>
-              </a:rPr>
-              <a:t>Hy</a:t>
+              <a:t> Khang Hy</a:t>
             </a:r>
             <a:endParaRPr lang="zh-TW" altLang="en-US" sz="5400" b="1" i="1" dirty="0">
               <a:solidFill>
@@ -3486,7 +3435,7 @@
         </p:nvSpPr>
         <p:spPr>
           <a:xfrm>
-            <a:off x="0" y="2167982"/>
+            <a:off x="0" y="2167984"/>
             <a:ext cx="12192000" cy="1318225"/>
           </a:xfrm>
         </p:spPr>
@@ -3504,7 +3453,6 @@
                 <a:solidFill>
                   <a:srgbClr val="000066"/>
                 </a:solidFill>
-                <a:effectLst/>
                 <a:latin typeface="微軟正黑體" pitchFamily="34" charset="-120"/>
                 <a:ea typeface="微軟正黑體" pitchFamily="34" charset="-120"/>
               </a:rPr>
@@ -3514,7 +3462,6 @@
               <a:solidFill>
                 <a:srgbClr val="000066"/>
               </a:solidFill>
-              <a:effectLst/>
               <a:latin typeface="微軟正黑體" pitchFamily="34" charset="-120"/>
               <a:ea typeface="微軟正黑體" pitchFamily="34" charset="-120"/>
             </a:endParaRPr>
@@ -3531,7 +3478,7 @@
         </p:nvSpPr>
         <p:spPr>
           <a:xfrm>
-            <a:off x="0" y="3263005"/>
+            <a:off x="0" y="3044958"/>
             <a:ext cx="12192000" cy="1318225"/>
           </a:xfrm>
           <a:prstGeom prst="rect">
@@ -3688,7 +3635,6 @@
                 <a:solidFill>
                   <a:srgbClr val="660033"/>
                 </a:solidFill>
-                <a:effectLst/>
                 <a:latin typeface="Calibri" panose="020F0502020204030204" pitchFamily="34" charset="0"/>
                 <a:ea typeface="微軟正黑體" pitchFamily="34" charset="-120"/>
                 <a:cs typeface="Calibri" panose="020F0502020204030204" pitchFamily="34" charset="0"/>
@@ -3700,7 +3646,6 @@
                 <a:solidFill>
                   <a:srgbClr val="660033"/>
                 </a:solidFill>
-                <a:effectLst/>
                 <a:latin typeface="Calibri" panose="020F0502020204030204" pitchFamily="34" charset="0"/>
                 <a:ea typeface="微軟正黑體" pitchFamily="34" charset="-120"/>
                 <a:cs typeface="Calibri" panose="020F0502020204030204" pitchFamily="34" charset="0"/>
@@ -3712,7 +3657,6 @@
                 <a:solidFill>
                   <a:srgbClr val="660033"/>
                 </a:solidFill>
-                <a:effectLst/>
                 <a:latin typeface="Calibri" panose="020F0502020204030204" pitchFamily="34" charset="0"/>
                 <a:ea typeface="微軟正黑體" pitchFamily="34" charset="-120"/>
                 <a:cs typeface="Calibri" panose="020F0502020204030204" pitchFamily="34" charset="0"/>
@@ -3724,7 +3668,6 @@
                 <a:solidFill>
                   <a:srgbClr val="660033"/>
                 </a:solidFill>
-                <a:effectLst/>
                 <a:latin typeface="Calibri" panose="020F0502020204030204" pitchFamily="34" charset="0"/>
                 <a:ea typeface="微軟正黑體" pitchFamily="34" charset="-120"/>
                 <a:cs typeface="Calibri" panose="020F0502020204030204" pitchFamily="34" charset="0"/>
@@ -3736,7 +3679,6 @@
                 <a:solidFill>
                   <a:srgbClr val="660033"/>
                 </a:solidFill>
-                <a:effectLst/>
                 <a:latin typeface="Calibri" panose="020F0502020204030204" pitchFamily="34" charset="0"/>
                 <a:ea typeface="微軟正黑體" pitchFamily="34" charset="-120"/>
                 <a:cs typeface="Calibri" panose="020F0502020204030204" pitchFamily="34" charset="0"/>
@@ -3748,7 +3690,6 @@
                 <a:solidFill>
                   <a:srgbClr val="660033"/>
                 </a:solidFill>
-                <a:effectLst/>
                 <a:latin typeface="Calibri" panose="020F0502020204030204" pitchFamily="34" charset="0"/>
                 <a:ea typeface="微軟正黑體" pitchFamily="34" charset="-120"/>
                 <a:cs typeface="Calibri" panose="020F0502020204030204" pitchFamily="34" charset="0"/>
@@ -3760,7 +3701,6 @@
                 <a:solidFill>
                   <a:srgbClr val="660033"/>
                 </a:solidFill>
-                <a:effectLst/>
                 <a:latin typeface="Calibri" panose="020F0502020204030204" pitchFamily="34" charset="0"/>
                 <a:ea typeface="微軟正黑體" pitchFamily="34" charset="-120"/>
                 <a:cs typeface="Calibri" panose="020F0502020204030204" pitchFamily="34" charset="0"/>
@@ -3772,7 +3712,6 @@
                 <a:solidFill>
                   <a:srgbClr val="660033"/>
                 </a:solidFill>
-                <a:effectLst/>
                 <a:latin typeface="Calibri" panose="020F0502020204030204" pitchFamily="34" charset="0"/>
                 <a:ea typeface="微軟正黑體" pitchFamily="34" charset="-120"/>
                 <a:cs typeface="Calibri" panose="020F0502020204030204" pitchFamily="34" charset="0"/>
@@ -3784,7 +3723,6 @@
                 <a:solidFill>
                   <a:srgbClr val="660033"/>
                 </a:solidFill>
-                <a:effectLst/>
                 <a:latin typeface="Calibri" panose="020F0502020204030204" pitchFamily="34" charset="0"/>
                 <a:ea typeface="微軟正黑體" pitchFamily="34" charset="-120"/>
                 <a:cs typeface="Calibri" panose="020F0502020204030204" pitchFamily="34" charset="0"/>
@@ -3796,7 +3734,6 @@
                 <a:solidFill>
                   <a:srgbClr val="660033"/>
                 </a:solidFill>
-                <a:effectLst/>
                 <a:latin typeface="Calibri" panose="020F0502020204030204" pitchFamily="34" charset="0"/>
                 <a:ea typeface="微軟正黑體" pitchFamily="34" charset="-120"/>
                 <a:cs typeface="Calibri" panose="020F0502020204030204" pitchFamily="34" charset="0"/>
@@ -3808,7 +3745,6 @@
                 <a:solidFill>
                   <a:srgbClr val="660033"/>
                 </a:solidFill>
-                <a:effectLst/>
                 <a:latin typeface="Calibri" panose="020F0502020204030204" pitchFamily="34" charset="0"/>
                 <a:ea typeface="微軟正黑體" pitchFamily="34" charset="-120"/>
                 <a:cs typeface="Calibri" panose="020F0502020204030204" pitchFamily="34" charset="0"/>
@@ -3820,7 +3756,6 @@
                 <a:solidFill>
                   <a:srgbClr val="660033"/>
                 </a:solidFill>
-                <a:effectLst/>
                 <a:latin typeface="Calibri" panose="020F0502020204030204" pitchFamily="34" charset="0"/>
                 <a:ea typeface="微軟正黑體" pitchFamily="34" charset="-120"/>
                 <a:cs typeface="Calibri" panose="020F0502020204030204" pitchFamily="34" charset="0"/>
@@ -3832,7 +3767,6 @@
                 <a:solidFill>
                   <a:srgbClr val="660033"/>
                 </a:solidFill>
-                <a:effectLst/>
                 <a:latin typeface="Calibri" panose="020F0502020204030204" pitchFamily="34" charset="0"/>
                 <a:ea typeface="微軟正黑體" pitchFamily="34" charset="-120"/>
                 <a:cs typeface="Calibri" panose="020F0502020204030204" pitchFamily="34" charset="0"/>
@@ -3844,7 +3778,6 @@
                 <a:solidFill>
                   <a:srgbClr val="660033"/>
                 </a:solidFill>
-                <a:effectLst/>
                 <a:latin typeface="Calibri" panose="020F0502020204030204" pitchFamily="34" charset="0"/>
                 <a:ea typeface="微軟正黑體" pitchFamily="34" charset="-120"/>
                 <a:cs typeface="Calibri" panose="020F0502020204030204" pitchFamily="34" charset="0"/>
@@ -3855,7 +3788,6 @@
               <a:solidFill>
                 <a:srgbClr val="660033"/>
               </a:solidFill>
-              <a:effectLst/>
               <a:latin typeface="Calibri" panose="020F0502020204030204" pitchFamily="34" charset="0"/>
               <a:ea typeface="微軟正黑體" pitchFamily="34" charset="-120"/>
               <a:cs typeface="Calibri" panose="020F0502020204030204" pitchFamily="34" charset="0"/>
@@ -3905,7 +3837,7 @@
         </p:nvSpPr>
         <p:spPr>
           <a:xfrm>
-            <a:off x="0" y="2167982"/>
+            <a:off x="0" y="2167984"/>
             <a:ext cx="12192000" cy="1318225"/>
           </a:xfrm>
         </p:spPr>
@@ -3923,7 +3855,6 @@
                 <a:solidFill>
                   <a:srgbClr val="000066"/>
                 </a:solidFill>
-                <a:effectLst/>
                 <a:latin typeface="微軟正黑體" pitchFamily="34" charset="-120"/>
                 <a:ea typeface="微軟正黑體" pitchFamily="34" charset="-120"/>
               </a:rPr>
@@ -3933,7 +3864,6 @@
               <a:solidFill>
                 <a:srgbClr val="000066"/>
               </a:solidFill>
-              <a:effectLst/>
               <a:latin typeface="微軟正黑體" pitchFamily="34" charset="-120"/>
               <a:ea typeface="微軟正黑體" pitchFamily="34" charset="-120"/>
             </a:endParaRPr>
@@ -3950,7 +3880,7 @@
         </p:nvSpPr>
         <p:spPr>
           <a:xfrm>
-            <a:off x="0" y="3263005"/>
+            <a:off x="0" y="3044958"/>
             <a:ext cx="12192000" cy="1318225"/>
           </a:xfrm>
           <a:prstGeom prst="rect">
@@ -4107,7 +4037,6 @@
                 <a:solidFill>
                   <a:srgbClr val="660033"/>
                 </a:solidFill>
-                <a:effectLst/>
                 <a:latin typeface="Calibri" panose="020F0502020204030204" pitchFamily="34" charset="0"/>
                 <a:ea typeface="微軟正黑體" pitchFamily="34" charset="-120"/>
                 <a:cs typeface="Calibri" panose="020F0502020204030204" pitchFamily="34" charset="0"/>
@@ -4119,7 +4048,6 @@
                 <a:solidFill>
                   <a:srgbClr val="660033"/>
                 </a:solidFill>
-                <a:effectLst/>
                 <a:latin typeface="Calibri" panose="020F0502020204030204" pitchFamily="34" charset="0"/>
                 <a:ea typeface="微軟正黑體" pitchFamily="34" charset="-120"/>
                 <a:cs typeface="Calibri" panose="020F0502020204030204" pitchFamily="34" charset="0"/>
@@ -4131,7 +4059,6 @@
                 <a:solidFill>
                   <a:srgbClr val="660033"/>
                 </a:solidFill>
-                <a:effectLst/>
                 <a:latin typeface="Calibri" panose="020F0502020204030204" pitchFamily="34" charset="0"/>
                 <a:ea typeface="微軟正黑體" pitchFamily="34" charset="-120"/>
                 <a:cs typeface="Calibri" panose="020F0502020204030204" pitchFamily="34" charset="0"/>
@@ -4143,7 +4070,6 @@
                 <a:solidFill>
                   <a:srgbClr val="660033"/>
                 </a:solidFill>
-                <a:effectLst/>
                 <a:latin typeface="Calibri" panose="020F0502020204030204" pitchFamily="34" charset="0"/>
                 <a:ea typeface="微軟正黑體" pitchFamily="34" charset="-120"/>
                 <a:cs typeface="Calibri" panose="020F0502020204030204" pitchFamily="34" charset="0"/>
@@ -4155,7 +4081,6 @@
                 <a:solidFill>
                   <a:srgbClr val="660033"/>
                 </a:solidFill>
-                <a:effectLst/>
                 <a:latin typeface="Calibri" panose="020F0502020204030204" pitchFamily="34" charset="0"/>
                 <a:ea typeface="微軟正黑體" pitchFamily="34" charset="-120"/>
                 <a:cs typeface="Calibri" panose="020F0502020204030204" pitchFamily="34" charset="0"/>
@@ -4167,7 +4092,6 @@
                 <a:solidFill>
                   <a:srgbClr val="660033"/>
                 </a:solidFill>
-                <a:effectLst/>
                 <a:latin typeface="Calibri" panose="020F0502020204030204" pitchFamily="34" charset="0"/>
                 <a:ea typeface="微軟正黑體" pitchFamily="34" charset="-120"/>
                 <a:cs typeface="Calibri" panose="020F0502020204030204" pitchFamily="34" charset="0"/>
@@ -4179,7 +4103,6 @@
                 <a:solidFill>
                   <a:srgbClr val="660033"/>
                 </a:solidFill>
-                <a:effectLst/>
                 <a:latin typeface="Calibri" panose="020F0502020204030204" pitchFamily="34" charset="0"/>
                 <a:ea typeface="微軟正黑體" pitchFamily="34" charset="-120"/>
                 <a:cs typeface="Calibri" panose="020F0502020204030204" pitchFamily="34" charset="0"/>
@@ -4191,7 +4114,6 @@
                 <a:solidFill>
                   <a:srgbClr val="660033"/>
                 </a:solidFill>
-                <a:effectLst/>
                 <a:latin typeface="Calibri" panose="020F0502020204030204" pitchFamily="34" charset="0"/>
                 <a:ea typeface="微軟正黑體" pitchFamily="34" charset="-120"/>
                 <a:cs typeface="Calibri" panose="020F0502020204030204" pitchFamily="34" charset="0"/>
@@ -4203,7 +4125,6 @@
                 <a:solidFill>
                   <a:srgbClr val="660033"/>
                 </a:solidFill>
-                <a:effectLst/>
                 <a:latin typeface="Calibri" panose="020F0502020204030204" pitchFamily="34" charset="0"/>
                 <a:ea typeface="微軟正黑體" pitchFamily="34" charset="-120"/>
                 <a:cs typeface="Calibri" panose="020F0502020204030204" pitchFamily="34" charset="0"/>
@@ -4215,7 +4136,6 @@
                 <a:solidFill>
                   <a:srgbClr val="660033"/>
                 </a:solidFill>
-                <a:effectLst/>
                 <a:latin typeface="Calibri" panose="020F0502020204030204" pitchFamily="34" charset="0"/>
                 <a:ea typeface="微軟正黑體" pitchFamily="34" charset="-120"/>
                 <a:cs typeface="Calibri" panose="020F0502020204030204" pitchFamily="34" charset="0"/>
@@ -4227,7 +4147,6 @@
                 <a:solidFill>
                   <a:srgbClr val="660033"/>
                 </a:solidFill>
-                <a:effectLst/>
                 <a:latin typeface="Calibri" panose="020F0502020204030204" pitchFamily="34" charset="0"/>
                 <a:ea typeface="微軟正黑體" pitchFamily="34" charset="-120"/>
                 <a:cs typeface="Calibri" panose="020F0502020204030204" pitchFamily="34" charset="0"/>
@@ -4239,7 +4158,6 @@
                 <a:solidFill>
                   <a:srgbClr val="660033"/>
                 </a:solidFill>
-                <a:effectLst/>
                 <a:latin typeface="Calibri" panose="020F0502020204030204" pitchFamily="34" charset="0"/>
                 <a:ea typeface="微軟正黑體" pitchFamily="34" charset="-120"/>
                 <a:cs typeface="Calibri" panose="020F0502020204030204" pitchFamily="34" charset="0"/>
@@ -4251,7 +4169,6 @@
                 <a:solidFill>
                   <a:srgbClr val="660033"/>
                 </a:solidFill>
-                <a:effectLst/>
                 <a:latin typeface="Calibri" panose="020F0502020204030204" pitchFamily="34" charset="0"/>
                 <a:ea typeface="微軟正黑體" pitchFamily="34" charset="-120"/>
                 <a:cs typeface="Calibri" panose="020F0502020204030204" pitchFamily="34" charset="0"/>
@@ -4262,7 +4179,6 @@
               <a:solidFill>
                 <a:srgbClr val="660033"/>
               </a:solidFill>
-              <a:effectLst/>
               <a:latin typeface="Calibri" panose="020F0502020204030204" pitchFamily="34" charset="0"/>
               <a:ea typeface="微軟正黑體" pitchFamily="34" charset="-120"/>
               <a:cs typeface="Calibri" panose="020F0502020204030204" pitchFamily="34" charset="0"/>
@@ -4312,7 +4228,7 @@
         </p:nvSpPr>
         <p:spPr>
           <a:xfrm>
-            <a:off x="0" y="2167982"/>
+            <a:off x="0" y="2167984"/>
             <a:ext cx="12192000" cy="1318225"/>
           </a:xfrm>
         </p:spPr>
@@ -4330,7 +4246,6 @@
                 <a:solidFill>
                   <a:srgbClr val="000066"/>
                 </a:solidFill>
-                <a:effectLst/>
                 <a:latin typeface="微軟正黑體" pitchFamily="34" charset="-120"/>
                 <a:ea typeface="微軟正黑體" pitchFamily="34" charset="-120"/>
               </a:rPr>
@@ -4340,7 +4255,6 @@
               <a:solidFill>
                 <a:srgbClr val="000066"/>
               </a:solidFill>
-              <a:effectLst/>
               <a:latin typeface="微軟正黑體" pitchFamily="34" charset="-120"/>
               <a:ea typeface="微軟正黑體" pitchFamily="34" charset="-120"/>
             </a:endParaRPr>
@@ -4357,7 +4271,7 @@
         </p:nvSpPr>
         <p:spPr>
           <a:xfrm>
-            <a:off x="0" y="3263005"/>
+            <a:off x="0" y="3044958"/>
             <a:ext cx="12192000" cy="1318225"/>
           </a:xfrm>
           <a:prstGeom prst="rect">
@@ -4514,7 +4428,6 @@
                 <a:solidFill>
                   <a:srgbClr val="660033"/>
                 </a:solidFill>
-                <a:effectLst/>
                 <a:latin typeface="Calibri" panose="020F0502020204030204" pitchFamily="34" charset="0"/>
                 <a:ea typeface="微軟正黑體" pitchFamily="34" charset="-120"/>
                 <a:cs typeface="Calibri" panose="020F0502020204030204" pitchFamily="34" charset="0"/>
@@ -4526,7 +4439,6 @@
                 <a:solidFill>
                   <a:srgbClr val="660033"/>
                 </a:solidFill>
-                <a:effectLst/>
                 <a:latin typeface="Calibri" panose="020F0502020204030204" pitchFamily="34" charset="0"/>
                 <a:ea typeface="微軟正黑體" pitchFamily="34" charset="-120"/>
                 <a:cs typeface="Calibri" panose="020F0502020204030204" pitchFamily="34" charset="0"/>
@@ -4538,7 +4450,6 @@
                 <a:solidFill>
                   <a:srgbClr val="660033"/>
                 </a:solidFill>
-                <a:effectLst/>
                 <a:latin typeface="Calibri" panose="020F0502020204030204" pitchFamily="34" charset="0"/>
                 <a:ea typeface="微軟正黑體" pitchFamily="34" charset="-120"/>
                 <a:cs typeface="Calibri" panose="020F0502020204030204" pitchFamily="34" charset="0"/>
@@ -4550,7 +4461,6 @@
                 <a:solidFill>
                   <a:srgbClr val="660033"/>
                 </a:solidFill>
-                <a:effectLst/>
                 <a:latin typeface="Calibri" panose="020F0502020204030204" pitchFamily="34" charset="0"/>
                 <a:ea typeface="微軟正黑體" pitchFamily="34" charset="-120"/>
                 <a:cs typeface="Calibri" panose="020F0502020204030204" pitchFamily="34" charset="0"/>
@@ -4562,7 +4472,6 @@
                 <a:solidFill>
                   <a:srgbClr val="660033"/>
                 </a:solidFill>
-                <a:effectLst/>
                 <a:latin typeface="Calibri" panose="020F0502020204030204" pitchFamily="34" charset="0"/>
                 <a:ea typeface="微軟正黑體" pitchFamily="34" charset="-120"/>
                 <a:cs typeface="Calibri" panose="020F0502020204030204" pitchFamily="34" charset="0"/>
@@ -4574,7 +4483,6 @@
                 <a:solidFill>
                   <a:srgbClr val="660033"/>
                 </a:solidFill>
-                <a:effectLst/>
                 <a:latin typeface="Calibri" panose="020F0502020204030204" pitchFamily="34" charset="0"/>
                 <a:ea typeface="微軟正黑體" pitchFamily="34" charset="-120"/>
                 <a:cs typeface="Calibri" panose="020F0502020204030204" pitchFamily="34" charset="0"/>
@@ -4586,7 +4494,6 @@
                 <a:solidFill>
                   <a:srgbClr val="660033"/>
                 </a:solidFill>
-                <a:effectLst/>
                 <a:latin typeface="Calibri" panose="020F0502020204030204" pitchFamily="34" charset="0"/>
                 <a:ea typeface="微軟正黑體" pitchFamily="34" charset="-120"/>
                 <a:cs typeface="Calibri" panose="020F0502020204030204" pitchFamily="34" charset="0"/>
@@ -4598,7 +4505,6 @@
                 <a:solidFill>
                   <a:srgbClr val="660033"/>
                 </a:solidFill>
-                <a:effectLst/>
                 <a:latin typeface="Calibri" panose="020F0502020204030204" pitchFamily="34" charset="0"/>
                 <a:ea typeface="微軟正黑體" pitchFamily="34" charset="-120"/>
                 <a:cs typeface="Calibri" panose="020F0502020204030204" pitchFamily="34" charset="0"/>
@@ -4610,7 +4516,6 @@
                 <a:solidFill>
                   <a:srgbClr val="660033"/>
                 </a:solidFill>
-                <a:effectLst/>
                 <a:latin typeface="Calibri" panose="020F0502020204030204" pitchFamily="34" charset="0"/>
                 <a:ea typeface="微軟正黑體" pitchFamily="34" charset="-120"/>
                 <a:cs typeface="Calibri" panose="020F0502020204030204" pitchFamily="34" charset="0"/>
@@ -4622,7 +4527,6 @@
                 <a:solidFill>
                   <a:srgbClr val="660033"/>
                 </a:solidFill>
-                <a:effectLst/>
                 <a:latin typeface="Calibri" panose="020F0502020204030204" pitchFamily="34" charset="0"/>
                 <a:ea typeface="微軟正黑體" pitchFamily="34" charset="-120"/>
                 <a:cs typeface="Calibri" panose="020F0502020204030204" pitchFamily="34" charset="0"/>
@@ -4634,7 +4538,6 @@
                 <a:solidFill>
                   <a:srgbClr val="660033"/>
                 </a:solidFill>
-                <a:effectLst/>
                 <a:latin typeface="Calibri" panose="020F0502020204030204" pitchFamily="34" charset="0"/>
                 <a:ea typeface="微軟正黑體" pitchFamily="34" charset="-120"/>
                 <a:cs typeface="Calibri" panose="020F0502020204030204" pitchFamily="34" charset="0"/>
@@ -4646,7 +4549,6 @@
                 <a:solidFill>
                   <a:srgbClr val="660033"/>
                 </a:solidFill>
-                <a:effectLst/>
                 <a:latin typeface="Calibri" panose="020F0502020204030204" pitchFamily="34" charset="0"/>
                 <a:ea typeface="微軟正黑體" pitchFamily="34" charset="-120"/>
                 <a:cs typeface="Calibri" panose="020F0502020204030204" pitchFamily="34" charset="0"/>
@@ -4658,7 +4560,6 @@
                 <a:solidFill>
                   <a:srgbClr val="660033"/>
                 </a:solidFill>
-                <a:effectLst/>
                 <a:latin typeface="Calibri" panose="020F0502020204030204" pitchFamily="34" charset="0"/>
                 <a:ea typeface="微軟正黑體" pitchFamily="34" charset="-120"/>
                 <a:cs typeface="Calibri" panose="020F0502020204030204" pitchFamily="34" charset="0"/>
@@ -4669,7 +4570,6 @@
               <a:solidFill>
                 <a:srgbClr val="660033"/>
               </a:solidFill>
-              <a:effectLst/>
               <a:latin typeface="Calibri" panose="020F0502020204030204" pitchFamily="34" charset="0"/>
               <a:ea typeface="微軟正黑體" pitchFamily="34" charset="-120"/>
               <a:cs typeface="Calibri" panose="020F0502020204030204" pitchFamily="34" charset="0"/>
@@ -4719,7 +4619,7 @@
         </p:nvSpPr>
         <p:spPr>
           <a:xfrm>
-            <a:off x="0" y="2167982"/>
+            <a:off x="0" y="2167984"/>
             <a:ext cx="12192000" cy="1318225"/>
           </a:xfrm>
         </p:spPr>
@@ -4737,7 +4637,6 @@
                 <a:solidFill>
                   <a:srgbClr val="000066"/>
                 </a:solidFill>
-                <a:effectLst/>
                 <a:latin typeface="微軟正黑體" pitchFamily="34" charset="-120"/>
                 <a:ea typeface="微軟正黑體" pitchFamily="34" charset="-120"/>
               </a:rPr>
@@ -4747,7 +4646,6 @@
               <a:solidFill>
                 <a:srgbClr val="000066"/>
               </a:solidFill>
-              <a:effectLst/>
               <a:latin typeface="微軟正黑體" pitchFamily="34" charset="-120"/>
               <a:ea typeface="微軟正黑體" pitchFamily="34" charset="-120"/>
             </a:endParaRPr>
@@ -4764,7 +4662,7 @@
         </p:nvSpPr>
         <p:spPr>
           <a:xfrm>
-            <a:off x="0" y="3263005"/>
+            <a:off x="0" y="3044958"/>
             <a:ext cx="12192000" cy="1318225"/>
           </a:xfrm>
           <a:prstGeom prst="rect">
@@ -4921,7 +4819,6 @@
                 <a:solidFill>
                   <a:srgbClr val="660033"/>
                 </a:solidFill>
-                <a:effectLst/>
                 <a:latin typeface="Calibri" panose="020F0502020204030204" pitchFamily="34" charset="0"/>
                 <a:ea typeface="微軟正黑體" pitchFamily="34" charset="-120"/>
                 <a:cs typeface="Calibri" panose="020F0502020204030204" pitchFamily="34" charset="0"/>
@@ -4933,7 +4830,6 @@
                 <a:solidFill>
                   <a:srgbClr val="660033"/>
                 </a:solidFill>
-                <a:effectLst/>
                 <a:latin typeface="Calibri" panose="020F0502020204030204" pitchFamily="34" charset="0"/>
                 <a:ea typeface="微軟正黑體" pitchFamily="34" charset="-120"/>
                 <a:cs typeface="Calibri" panose="020F0502020204030204" pitchFamily="34" charset="0"/>
@@ -4945,7 +4841,6 @@
                 <a:solidFill>
                   <a:srgbClr val="660033"/>
                 </a:solidFill>
-                <a:effectLst/>
                 <a:latin typeface="Calibri" panose="020F0502020204030204" pitchFamily="34" charset="0"/>
                 <a:ea typeface="微軟正黑體" pitchFamily="34" charset="-120"/>
                 <a:cs typeface="Calibri" panose="020F0502020204030204" pitchFamily="34" charset="0"/>
@@ -4957,7 +4852,6 @@
                 <a:solidFill>
                   <a:srgbClr val="660033"/>
                 </a:solidFill>
-                <a:effectLst/>
                 <a:latin typeface="Calibri" panose="020F0502020204030204" pitchFamily="34" charset="0"/>
                 <a:ea typeface="微軟正黑體" pitchFamily="34" charset="-120"/>
                 <a:cs typeface="Calibri" panose="020F0502020204030204" pitchFamily="34" charset="0"/>
@@ -4969,7 +4863,6 @@
                 <a:solidFill>
                   <a:srgbClr val="660033"/>
                 </a:solidFill>
-                <a:effectLst/>
                 <a:latin typeface="Calibri" panose="020F0502020204030204" pitchFamily="34" charset="0"/>
                 <a:ea typeface="微軟正黑體" pitchFamily="34" charset="-120"/>
                 <a:cs typeface="Calibri" panose="020F0502020204030204" pitchFamily="34" charset="0"/>
@@ -4981,7 +4874,6 @@
                 <a:solidFill>
                   <a:srgbClr val="660033"/>
                 </a:solidFill>
-                <a:effectLst/>
                 <a:latin typeface="Calibri" panose="020F0502020204030204" pitchFamily="34" charset="0"/>
                 <a:ea typeface="微軟正黑體" pitchFamily="34" charset="-120"/>
                 <a:cs typeface="Calibri" panose="020F0502020204030204" pitchFamily="34" charset="0"/>
@@ -4993,7 +4885,6 @@
                 <a:solidFill>
                   <a:srgbClr val="660033"/>
                 </a:solidFill>
-                <a:effectLst/>
                 <a:latin typeface="Calibri" panose="020F0502020204030204" pitchFamily="34" charset="0"/>
                 <a:ea typeface="微軟正黑體" pitchFamily="34" charset="-120"/>
                 <a:cs typeface="Calibri" panose="020F0502020204030204" pitchFamily="34" charset="0"/>
@@ -5005,7 +4896,6 @@
                 <a:solidFill>
                   <a:srgbClr val="660033"/>
                 </a:solidFill>
-                <a:effectLst/>
                 <a:latin typeface="Calibri" panose="020F0502020204030204" pitchFamily="34" charset="0"/>
                 <a:ea typeface="微軟正黑體" pitchFamily="34" charset="-120"/>
                 <a:cs typeface="Calibri" panose="020F0502020204030204" pitchFamily="34" charset="0"/>
@@ -5017,7 +4907,6 @@
                 <a:solidFill>
                   <a:srgbClr val="660033"/>
                 </a:solidFill>
-                <a:effectLst/>
                 <a:latin typeface="Calibri" panose="020F0502020204030204" pitchFamily="34" charset="0"/>
                 <a:ea typeface="微軟正黑體" pitchFamily="34" charset="-120"/>
                 <a:cs typeface="Calibri" panose="020F0502020204030204" pitchFamily="34" charset="0"/>
@@ -5029,7 +4918,6 @@
                 <a:solidFill>
                   <a:srgbClr val="660033"/>
                 </a:solidFill>
-                <a:effectLst/>
                 <a:latin typeface="Calibri" panose="020F0502020204030204" pitchFamily="34" charset="0"/>
                 <a:ea typeface="微軟正黑體" pitchFamily="34" charset="-120"/>
                 <a:cs typeface="Calibri" panose="020F0502020204030204" pitchFamily="34" charset="0"/>
@@ -5041,7 +4929,6 @@
                 <a:solidFill>
                   <a:srgbClr val="660033"/>
                 </a:solidFill>
-                <a:effectLst/>
                 <a:latin typeface="Calibri" panose="020F0502020204030204" pitchFamily="34" charset="0"/>
                 <a:ea typeface="微軟正黑體" pitchFamily="34" charset="-120"/>
                 <a:cs typeface="Calibri" panose="020F0502020204030204" pitchFamily="34" charset="0"/>
@@ -5053,7 +4940,6 @@
                 <a:solidFill>
                   <a:srgbClr val="660033"/>
                 </a:solidFill>
-                <a:effectLst/>
                 <a:latin typeface="Calibri" panose="020F0502020204030204" pitchFamily="34" charset="0"/>
                 <a:ea typeface="微軟正黑體" pitchFamily="34" charset="-120"/>
                 <a:cs typeface="Calibri" panose="020F0502020204030204" pitchFamily="34" charset="0"/>
@@ -5064,7 +4950,6 @@
               <a:solidFill>
                 <a:srgbClr val="660033"/>
               </a:solidFill>
-              <a:effectLst/>
               <a:latin typeface="Calibri" panose="020F0502020204030204" pitchFamily="34" charset="0"/>
               <a:ea typeface="微軟正黑體" pitchFamily="34" charset="-120"/>
               <a:cs typeface="Calibri" panose="020F0502020204030204" pitchFamily="34" charset="0"/>
@@ -5114,7 +4999,7 @@
         </p:nvSpPr>
         <p:spPr>
           <a:xfrm>
-            <a:off x="0" y="2167982"/>
+            <a:off x="0" y="2167984"/>
             <a:ext cx="12192000" cy="1318225"/>
           </a:xfrm>
         </p:spPr>
@@ -5132,7 +5017,6 @@
                 <a:solidFill>
                   <a:srgbClr val="000066"/>
                 </a:solidFill>
-                <a:effectLst/>
                 <a:latin typeface="微軟正黑體" pitchFamily="34" charset="-120"/>
                 <a:ea typeface="微軟正黑體" pitchFamily="34" charset="-120"/>
               </a:rPr>
@@ -5142,7 +5026,6 @@
               <a:solidFill>
                 <a:srgbClr val="000066"/>
               </a:solidFill>
-              <a:effectLst/>
               <a:latin typeface="微軟正黑體" pitchFamily="34" charset="-120"/>
               <a:ea typeface="微軟正黑體" pitchFamily="34" charset="-120"/>
             </a:endParaRPr>
@@ -5159,7 +5042,7 @@
         </p:nvSpPr>
         <p:spPr>
           <a:xfrm>
-            <a:off x="0" y="3263005"/>
+            <a:off x="0" y="3044958"/>
             <a:ext cx="12192000" cy="1318225"/>
           </a:xfrm>
           <a:prstGeom prst="rect">
@@ -5316,7 +5199,6 @@
                 <a:solidFill>
                   <a:srgbClr val="660033"/>
                 </a:solidFill>
-                <a:effectLst/>
                 <a:latin typeface="Calibri" panose="020F0502020204030204" pitchFamily="34" charset="0"/>
                 <a:ea typeface="微軟正黑體" pitchFamily="34" charset="-120"/>
                 <a:cs typeface="Calibri" panose="020F0502020204030204" pitchFamily="34" charset="0"/>
@@ -5328,7 +5210,6 @@
                 <a:solidFill>
                   <a:srgbClr val="660033"/>
                 </a:solidFill>
-                <a:effectLst/>
                 <a:latin typeface="Calibri" panose="020F0502020204030204" pitchFamily="34" charset="0"/>
                 <a:ea typeface="微軟正黑體" pitchFamily="34" charset="-120"/>
                 <a:cs typeface="Calibri" panose="020F0502020204030204" pitchFamily="34" charset="0"/>
@@ -5340,7 +5221,6 @@
                 <a:solidFill>
                   <a:srgbClr val="660033"/>
                 </a:solidFill>
-                <a:effectLst/>
                 <a:latin typeface="Calibri" panose="020F0502020204030204" pitchFamily="34" charset="0"/>
                 <a:ea typeface="微軟正黑體" pitchFamily="34" charset="-120"/>
                 <a:cs typeface="Calibri" panose="020F0502020204030204" pitchFamily="34" charset="0"/>
@@ -5352,7 +5232,6 @@
                 <a:solidFill>
                   <a:srgbClr val="660033"/>
                 </a:solidFill>
-                <a:effectLst/>
                 <a:latin typeface="Calibri" panose="020F0502020204030204" pitchFamily="34" charset="0"/>
                 <a:ea typeface="微軟正黑體" pitchFamily="34" charset="-120"/>
                 <a:cs typeface="Calibri" panose="020F0502020204030204" pitchFamily="34" charset="0"/>
@@ -5364,7 +5243,6 @@
                 <a:solidFill>
                   <a:srgbClr val="660033"/>
                 </a:solidFill>
-                <a:effectLst/>
                 <a:latin typeface="Calibri" panose="020F0502020204030204" pitchFamily="34" charset="0"/>
                 <a:ea typeface="微軟正黑體" pitchFamily="34" charset="-120"/>
                 <a:cs typeface="Calibri" panose="020F0502020204030204" pitchFamily="34" charset="0"/>
@@ -5376,7 +5254,6 @@
                 <a:solidFill>
                   <a:srgbClr val="660033"/>
                 </a:solidFill>
-                <a:effectLst/>
                 <a:latin typeface="Calibri" panose="020F0502020204030204" pitchFamily="34" charset="0"/>
                 <a:ea typeface="微軟正黑體" pitchFamily="34" charset="-120"/>
                 <a:cs typeface="Calibri" panose="020F0502020204030204" pitchFamily="34" charset="0"/>
@@ -5388,7 +5265,6 @@
                 <a:solidFill>
                   <a:srgbClr val="660033"/>
                 </a:solidFill>
-                <a:effectLst/>
                 <a:latin typeface="Calibri" panose="020F0502020204030204" pitchFamily="34" charset="0"/>
                 <a:ea typeface="微軟正黑體" pitchFamily="34" charset="-120"/>
                 <a:cs typeface="Calibri" panose="020F0502020204030204" pitchFamily="34" charset="0"/>
@@ -5400,7 +5276,6 @@
                 <a:solidFill>
                   <a:srgbClr val="660033"/>
                 </a:solidFill>
-                <a:effectLst/>
                 <a:latin typeface="Calibri" panose="020F0502020204030204" pitchFamily="34" charset="0"/>
                 <a:ea typeface="微軟正黑體" pitchFamily="34" charset="-120"/>
                 <a:cs typeface="Calibri" panose="020F0502020204030204" pitchFamily="34" charset="0"/>
@@ -5412,7 +5287,6 @@
                 <a:solidFill>
                   <a:srgbClr val="660033"/>
                 </a:solidFill>
-                <a:effectLst/>
                 <a:latin typeface="Calibri" panose="020F0502020204030204" pitchFamily="34" charset="0"/>
                 <a:ea typeface="微軟正黑體" pitchFamily="34" charset="-120"/>
                 <a:cs typeface="Calibri" panose="020F0502020204030204" pitchFamily="34" charset="0"/>
@@ -5424,7 +5298,6 @@
                 <a:solidFill>
                   <a:srgbClr val="660033"/>
                 </a:solidFill>
-                <a:effectLst/>
                 <a:latin typeface="Calibri" panose="020F0502020204030204" pitchFamily="34" charset="0"/>
                 <a:ea typeface="微軟正黑體" pitchFamily="34" charset="-120"/>
                 <a:cs typeface="Calibri" panose="020F0502020204030204" pitchFamily="34" charset="0"/>
@@ -5436,7 +5309,6 @@
                 <a:solidFill>
                   <a:srgbClr val="660033"/>
                 </a:solidFill>
-                <a:effectLst/>
                 <a:latin typeface="Calibri" panose="020F0502020204030204" pitchFamily="34" charset="0"/>
                 <a:ea typeface="微軟正黑體" pitchFamily="34" charset="-120"/>
                 <a:cs typeface="Calibri" panose="020F0502020204030204" pitchFamily="34" charset="0"/>
@@ -5447,7 +5319,6 @@
               <a:solidFill>
                 <a:srgbClr val="660033"/>
               </a:solidFill>
-              <a:effectLst/>
               <a:latin typeface="Calibri" panose="020F0502020204030204" pitchFamily="34" charset="0"/>
               <a:ea typeface="微軟正黑體" pitchFamily="34" charset="-120"/>
               <a:cs typeface="Calibri" panose="020F0502020204030204" pitchFamily="34" charset="0"/>
@@ -5497,7 +5368,7 @@
         </p:nvSpPr>
         <p:spPr>
           <a:xfrm>
-            <a:off x="0" y="2167982"/>
+            <a:off x="0" y="2167984"/>
             <a:ext cx="12192000" cy="1318225"/>
           </a:xfrm>
         </p:spPr>
@@ -5515,7 +5386,6 @@
                 <a:solidFill>
                   <a:srgbClr val="000066"/>
                 </a:solidFill>
-                <a:effectLst/>
                 <a:latin typeface="微軟正黑體" pitchFamily="34" charset="-120"/>
                 <a:ea typeface="微軟正黑體" pitchFamily="34" charset="-120"/>
               </a:rPr>
@@ -5525,7 +5395,6 @@
               <a:solidFill>
                 <a:srgbClr val="000066"/>
               </a:solidFill>
-              <a:effectLst/>
               <a:latin typeface="微軟正黑體" pitchFamily="34" charset="-120"/>
               <a:ea typeface="微軟正黑體" pitchFamily="34" charset="-120"/>
             </a:endParaRPr>
@@ -5542,7 +5411,7 @@
         </p:nvSpPr>
         <p:spPr>
           <a:xfrm>
-            <a:off x="0" y="3263005"/>
+            <a:off x="0" y="3044958"/>
             <a:ext cx="12192000" cy="1318225"/>
           </a:xfrm>
           <a:prstGeom prst="rect">
@@ -5699,7 +5568,6 @@
                 <a:solidFill>
                   <a:srgbClr val="660033"/>
                 </a:solidFill>
-                <a:effectLst/>
                 <a:latin typeface="Calibri" panose="020F0502020204030204" pitchFamily="34" charset="0"/>
                 <a:ea typeface="微軟正黑體" pitchFamily="34" charset="-120"/>
                 <a:cs typeface="Calibri" panose="020F0502020204030204" pitchFamily="34" charset="0"/>
@@ -5711,7 +5579,6 @@
                 <a:solidFill>
                   <a:srgbClr val="660033"/>
                 </a:solidFill>
-                <a:effectLst/>
                 <a:latin typeface="Calibri" panose="020F0502020204030204" pitchFamily="34" charset="0"/>
                 <a:ea typeface="微軟正黑體" pitchFamily="34" charset="-120"/>
                 <a:cs typeface="Calibri" panose="020F0502020204030204" pitchFamily="34" charset="0"/>
@@ -5723,7 +5590,6 @@
                 <a:solidFill>
                   <a:srgbClr val="660033"/>
                 </a:solidFill>
-                <a:effectLst/>
                 <a:latin typeface="Calibri" panose="020F0502020204030204" pitchFamily="34" charset="0"/>
                 <a:ea typeface="微軟正黑體" pitchFamily="34" charset="-120"/>
                 <a:cs typeface="Calibri" panose="020F0502020204030204" pitchFamily="34" charset="0"/>
@@ -5735,7 +5601,6 @@
                 <a:solidFill>
                   <a:srgbClr val="660033"/>
                 </a:solidFill>
-                <a:effectLst/>
                 <a:latin typeface="Calibri" panose="020F0502020204030204" pitchFamily="34" charset="0"/>
                 <a:ea typeface="微軟正黑體" pitchFamily="34" charset="-120"/>
                 <a:cs typeface="Calibri" panose="020F0502020204030204" pitchFamily="34" charset="0"/>
@@ -5747,7 +5612,6 @@
                 <a:solidFill>
                   <a:srgbClr val="660033"/>
                 </a:solidFill>
-                <a:effectLst/>
                 <a:latin typeface="Calibri" panose="020F0502020204030204" pitchFamily="34" charset="0"/>
                 <a:ea typeface="微軟正黑體" pitchFamily="34" charset="-120"/>
                 <a:cs typeface="Calibri" panose="020F0502020204030204" pitchFamily="34" charset="0"/>
@@ -5759,7 +5623,6 @@
                 <a:solidFill>
                   <a:srgbClr val="660033"/>
                 </a:solidFill>
-                <a:effectLst/>
                 <a:latin typeface="Calibri" panose="020F0502020204030204" pitchFamily="34" charset="0"/>
                 <a:ea typeface="微軟正黑體" pitchFamily="34" charset="-120"/>
                 <a:cs typeface="Calibri" panose="020F0502020204030204" pitchFamily="34" charset="0"/>
@@ -5771,7 +5634,6 @@
                 <a:solidFill>
                   <a:srgbClr val="660033"/>
                 </a:solidFill>
-                <a:effectLst/>
                 <a:latin typeface="Calibri" panose="020F0502020204030204" pitchFamily="34" charset="0"/>
                 <a:ea typeface="微軟正黑體" pitchFamily="34" charset="-120"/>
                 <a:cs typeface="Calibri" panose="020F0502020204030204" pitchFamily="34" charset="0"/>
@@ -5783,7 +5645,6 @@
                 <a:solidFill>
                   <a:srgbClr val="660033"/>
                 </a:solidFill>
-                <a:effectLst/>
                 <a:latin typeface="Calibri" panose="020F0502020204030204" pitchFamily="34" charset="0"/>
                 <a:ea typeface="微軟正黑體" pitchFamily="34" charset="-120"/>
                 <a:cs typeface="Calibri" panose="020F0502020204030204" pitchFamily="34" charset="0"/>
@@ -5795,7 +5656,6 @@
                 <a:solidFill>
                   <a:srgbClr val="660033"/>
                 </a:solidFill>
-                <a:effectLst/>
                 <a:latin typeface="Calibri" panose="020F0502020204030204" pitchFamily="34" charset="0"/>
                 <a:ea typeface="微軟正黑體" pitchFamily="34" charset="-120"/>
                 <a:cs typeface="Calibri" panose="020F0502020204030204" pitchFamily="34" charset="0"/>
@@ -5807,7 +5667,6 @@
                 <a:solidFill>
                   <a:srgbClr val="660033"/>
                 </a:solidFill>
-                <a:effectLst/>
                 <a:latin typeface="Calibri" panose="020F0502020204030204" pitchFamily="34" charset="0"/>
                 <a:ea typeface="微軟正黑體" pitchFamily="34" charset="-120"/>
                 <a:cs typeface="Calibri" panose="020F0502020204030204" pitchFamily="34" charset="0"/>
@@ -5819,7 +5678,6 @@
                 <a:solidFill>
                   <a:srgbClr val="660033"/>
                 </a:solidFill>
-                <a:effectLst/>
                 <a:latin typeface="Calibri" panose="020F0502020204030204" pitchFamily="34" charset="0"/>
                 <a:ea typeface="微軟正黑體" pitchFamily="34" charset="-120"/>
                 <a:cs typeface="Calibri" panose="020F0502020204030204" pitchFamily="34" charset="0"/>
@@ -5831,7 +5689,6 @@
                 <a:solidFill>
                   <a:srgbClr val="660033"/>
                 </a:solidFill>
-                <a:effectLst/>
                 <a:latin typeface="Calibri" panose="020F0502020204030204" pitchFamily="34" charset="0"/>
                 <a:ea typeface="微軟正黑體" pitchFamily="34" charset="-120"/>
                 <a:cs typeface="Calibri" panose="020F0502020204030204" pitchFamily="34" charset="0"/>
@@ -5843,7 +5700,6 @@
                 <a:solidFill>
                   <a:srgbClr val="660033"/>
                 </a:solidFill>
-                <a:effectLst/>
                 <a:latin typeface="Calibri" panose="020F0502020204030204" pitchFamily="34" charset="0"/>
                 <a:ea typeface="微軟正黑體" pitchFamily="34" charset="-120"/>
                 <a:cs typeface="Calibri" panose="020F0502020204030204" pitchFamily="34" charset="0"/>
@@ -5854,7 +5710,6 @@
               <a:solidFill>
                 <a:srgbClr val="660033"/>
               </a:solidFill>
-              <a:effectLst/>
               <a:latin typeface="Calibri" panose="020F0502020204030204" pitchFamily="34" charset="0"/>
               <a:ea typeface="微軟正黑體" pitchFamily="34" charset="-120"/>
               <a:cs typeface="Calibri" panose="020F0502020204030204" pitchFamily="34" charset="0"/>
@@ -5904,7 +5759,7 @@
         </p:nvSpPr>
         <p:spPr>
           <a:xfrm>
-            <a:off x="0" y="2167982"/>
+            <a:off x="0" y="2167984"/>
             <a:ext cx="12192000" cy="1318225"/>
           </a:xfrm>
         </p:spPr>
@@ -5922,7 +5777,6 @@
                 <a:solidFill>
                   <a:srgbClr val="000066"/>
                 </a:solidFill>
-                <a:effectLst/>
                 <a:latin typeface="微軟正黑體" pitchFamily="34" charset="-120"/>
                 <a:ea typeface="微軟正黑體" pitchFamily="34" charset="-120"/>
               </a:rPr>
@@ -5932,7 +5786,6 @@
               <a:solidFill>
                 <a:srgbClr val="000066"/>
               </a:solidFill>
-              <a:effectLst/>
               <a:latin typeface="微軟正黑體" pitchFamily="34" charset="-120"/>
               <a:ea typeface="微軟正黑體" pitchFamily="34" charset="-120"/>
             </a:endParaRPr>
@@ -5949,7 +5802,7 @@
         </p:nvSpPr>
         <p:spPr>
           <a:xfrm>
-            <a:off x="0" y="3263005"/>
+            <a:off x="0" y="3044958"/>
             <a:ext cx="12192000" cy="1318225"/>
           </a:xfrm>
           <a:prstGeom prst="rect">
@@ -6106,7 +5959,6 @@
                 <a:solidFill>
                   <a:srgbClr val="660033"/>
                 </a:solidFill>
-                <a:effectLst/>
                 <a:latin typeface="Calibri" panose="020F0502020204030204" pitchFamily="34" charset="0"/>
                 <a:ea typeface="微軟正黑體" pitchFamily="34" charset="-120"/>
                 <a:cs typeface="Calibri" panose="020F0502020204030204" pitchFamily="34" charset="0"/>
@@ -6118,7 +5970,6 @@
                 <a:solidFill>
                   <a:srgbClr val="660033"/>
                 </a:solidFill>
-                <a:effectLst/>
                 <a:latin typeface="Calibri" panose="020F0502020204030204" pitchFamily="34" charset="0"/>
                 <a:ea typeface="微軟正黑體" pitchFamily="34" charset="-120"/>
                 <a:cs typeface="Calibri" panose="020F0502020204030204" pitchFamily="34" charset="0"/>
@@ -6130,7 +5981,6 @@
                 <a:solidFill>
                   <a:srgbClr val="660033"/>
                 </a:solidFill>
-                <a:effectLst/>
                 <a:latin typeface="Calibri" panose="020F0502020204030204" pitchFamily="34" charset="0"/>
                 <a:ea typeface="微軟正黑體" pitchFamily="34" charset="-120"/>
                 <a:cs typeface="Calibri" panose="020F0502020204030204" pitchFamily="34" charset="0"/>
@@ -6142,7 +5992,6 @@
                 <a:solidFill>
                   <a:srgbClr val="660033"/>
                 </a:solidFill>
-                <a:effectLst/>
                 <a:latin typeface="Calibri" panose="020F0502020204030204" pitchFamily="34" charset="0"/>
                 <a:ea typeface="微軟正黑體" pitchFamily="34" charset="-120"/>
                 <a:cs typeface="Calibri" panose="020F0502020204030204" pitchFamily="34" charset="0"/>
@@ -6154,7 +6003,6 @@
                 <a:solidFill>
                   <a:srgbClr val="660033"/>
                 </a:solidFill>
-                <a:effectLst/>
                 <a:latin typeface="Calibri" panose="020F0502020204030204" pitchFamily="34" charset="0"/>
                 <a:ea typeface="微軟正黑體" pitchFamily="34" charset="-120"/>
                 <a:cs typeface="Calibri" panose="020F0502020204030204" pitchFamily="34" charset="0"/>
@@ -6166,7 +6014,6 @@
                 <a:solidFill>
                   <a:srgbClr val="660033"/>
                 </a:solidFill>
-                <a:effectLst/>
                 <a:latin typeface="Calibri" panose="020F0502020204030204" pitchFamily="34" charset="0"/>
                 <a:ea typeface="微軟正黑體" pitchFamily="34" charset="-120"/>
                 <a:cs typeface="Calibri" panose="020F0502020204030204" pitchFamily="34" charset="0"/>
@@ -6178,7 +6025,6 @@
                 <a:solidFill>
                   <a:srgbClr val="660033"/>
                 </a:solidFill>
-                <a:effectLst/>
                 <a:latin typeface="Calibri" panose="020F0502020204030204" pitchFamily="34" charset="0"/>
                 <a:ea typeface="微軟正黑體" pitchFamily="34" charset="-120"/>
                 <a:cs typeface="Calibri" panose="020F0502020204030204" pitchFamily="34" charset="0"/>
@@ -6190,7 +6036,6 @@
                 <a:solidFill>
                   <a:srgbClr val="660033"/>
                 </a:solidFill>
-                <a:effectLst/>
                 <a:latin typeface="Calibri" panose="020F0502020204030204" pitchFamily="34" charset="0"/>
                 <a:ea typeface="微軟正黑體" pitchFamily="34" charset="-120"/>
                 <a:cs typeface="Calibri" panose="020F0502020204030204" pitchFamily="34" charset="0"/>
@@ -6202,7 +6047,6 @@
                 <a:solidFill>
                   <a:srgbClr val="660033"/>
                 </a:solidFill>
-                <a:effectLst/>
                 <a:latin typeface="Calibri" panose="020F0502020204030204" pitchFamily="34" charset="0"/>
                 <a:ea typeface="微軟正黑體" pitchFamily="34" charset="-120"/>
                 <a:cs typeface="Calibri" panose="020F0502020204030204" pitchFamily="34" charset="0"/>
@@ -6214,7 +6058,6 @@
                 <a:solidFill>
                   <a:srgbClr val="660033"/>
                 </a:solidFill>
-                <a:effectLst/>
                 <a:latin typeface="Calibri" panose="020F0502020204030204" pitchFamily="34" charset="0"/>
                 <a:ea typeface="微軟正黑體" pitchFamily="34" charset="-120"/>
                 <a:cs typeface="Calibri" panose="020F0502020204030204" pitchFamily="34" charset="0"/>
@@ -6226,7 +6069,6 @@
                 <a:solidFill>
                   <a:srgbClr val="660033"/>
                 </a:solidFill>
-                <a:effectLst/>
                 <a:latin typeface="Calibri" panose="020F0502020204030204" pitchFamily="34" charset="0"/>
                 <a:ea typeface="微軟正黑體" pitchFamily="34" charset="-120"/>
                 <a:cs typeface="Calibri" panose="020F0502020204030204" pitchFamily="34" charset="0"/>
@@ -6237,7 +6079,6 @@
               <a:solidFill>
                 <a:srgbClr val="660033"/>
               </a:solidFill>
-              <a:effectLst/>
               <a:latin typeface="Calibri" panose="020F0502020204030204" pitchFamily="34" charset="0"/>
               <a:ea typeface="微軟正黑體" pitchFamily="34" charset="-120"/>
               <a:cs typeface="Calibri" panose="020F0502020204030204" pitchFamily="34" charset="0"/>
@@ -6287,7 +6128,7 @@
         </p:nvSpPr>
         <p:spPr>
           <a:xfrm>
-            <a:off x="0" y="2167982"/>
+            <a:off x="0" y="2167984"/>
             <a:ext cx="12192000" cy="1318225"/>
           </a:xfrm>
         </p:spPr>
@@ -6305,7 +6146,6 @@
                 <a:solidFill>
                   <a:srgbClr val="000066"/>
                 </a:solidFill>
-                <a:effectLst/>
                 <a:latin typeface="微軟正黑體" pitchFamily="34" charset="-120"/>
                 <a:ea typeface="微軟正黑體" pitchFamily="34" charset="-120"/>
               </a:rPr>
@@ -6315,7 +6155,6 @@
               <a:solidFill>
                 <a:srgbClr val="000066"/>
               </a:solidFill>
-              <a:effectLst/>
               <a:latin typeface="微軟正黑體" pitchFamily="34" charset="-120"/>
               <a:ea typeface="微軟正黑體" pitchFamily="34" charset="-120"/>
             </a:endParaRPr>
@@ -6332,7 +6171,7 @@
         </p:nvSpPr>
         <p:spPr>
           <a:xfrm>
-            <a:off x="0" y="3263005"/>
+            <a:off x="0" y="3044958"/>
             <a:ext cx="12192000" cy="1318225"/>
           </a:xfrm>
           <a:prstGeom prst="rect">
@@ -6489,7 +6328,6 @@
                 <a:solidFill>
                   <a:srgbClr val="660033"/>
                 </a:solidFill>
-                <a:effectLst/>
                 <a:latin typeface="Calibri" panose="020F0502020204030204" pitchFamily="34" charset="0"/>
                 <a:ea typeface="微軟正黑體" pitchFamily="34" charset="-120"/>
                 <a:cs typeface="Calibri" panose="020F0502020204030204" pitchFamily="34" charset="0"/>
@@ -6501,7 +6339,6 @@
                 <a:solidFill>
                   <a:srgbClr val="660033"/>
                 </a:solidFill>
-                <a:effectLst/>
                 <a:latin typeface="Calibri" panose="020F0502020204030204" pitchFamily="34" charset="0"/>
                 <a:ea typeface="微軟正黑體" pitchFamily="34" charset="-120"/>
                 <a:cs typeface="Calibri" panose="020F0502020204030204" pitchFamily="34" charset="0"/>
@@ -6513,7 +6350,6 @@
                 <a:solidFill>
                   <a:srgbClr val="660033"/>
                 </a:solidFill>
-                <a:effectLst/>
                 <a:latin typeface="Calibri" panose="020F0502020204030204" pitchFamily="34" charset="0"/>
                 <a:ea typeface="微軟正黑體" pitchFamily="34" charset="-120"/>
                 <a:cs typeface="Calibri" panose="020F0502020204030204" pitchFamily="34" charset="0"/>
@@ -6525,7 +6361,6 @@
                 <a:solidFill>
                   <a:srgbClr val="660033"/>
                 </a:solidFill>
-                <a:effectLst/>
                 <a:latin typeface="Calibri" panose="020F0502020204030204" pitchFamily="34" charset="0"/>
                 <a:ea typeface="微軟正黑體" pitchFamily="34" charset="-120"/>
                 <a:cs typeface="Calibri" panose="020F0502020204030204" pitchFamily="34" charset="0"/>
@@ -6537,7 +6372,6 @@
                 <a:solidFill>
                   <a:srgbClr val="660033"/>
                 </a:solidFill>
-                <a:effectLst/>
                 <a:latin typeface="Calibri" panose="020F0502020204030204" pitchFamily="34" charset="0"/>
                 <a:ea typeface="微軟正黑體" pitchFamily="34" charset="-120"/>
                 <a:cs typeface="Calibri" panose="020F0502020204030204" pitchFamily="34" charset="0"/>
@@ -6549,7 +6383,6 @@
                 <a:solidFill>
                   <a:srgbClr val="660033"/>
                 </a:solidFill>
-                <a:effectLst/>
                 <a:latin typeface="Calibri" panose="020F0502020204030204" pitchFamily="34" charset="0"/>
                 <a:ea typeface="微軟正黑體" pitchFamily="34" charset="-120"/>
                 <a:cs typeface="Calibri" panose="020F0502020204030204" pitchFamily="34" charset="0"/>
@@ -6561,7 +6394,6 @@
                 <a:solidFill>
                   <a:srgbClr val="660033"/>
                 </a:solidFill>
-                <a:effectLst/>
                 <a:latin typeface="Calibri" panose="020F0502020204030204" pitchFamily="34" charset="0"/>
                 <a:ea typeface="微軟正黑體" pitchFamily="34" charset="-120"/>
                 <a:cs typeface="Calibri" panose="020F0502020204030204" pitchFamily="34" charset="0"/>
@@ -6573,7 +6405,6 @@
                 <a:solidFill>
                   <a:srgbClr val="660033"/>
                 </a:solidFill>
-                <a:effectLst/>
                 <a:latin typeface="Calibri" panose="020F0502020204030204" pitchFamily="34" charset="0"/>
                 <a:ea typeface="微軟正黑體" pitchFamily="34" charset="-120"/>
                 <a:cs typeface="Calibri" panose="020F0502020204030204" pitchFamily="34" charset="0"/>
@@ -6581,11 +6412,10 @@
               <a:t> </a:t>
             </a:r>
             <a:r>
-              <a:rPr lang="en-US" sz="4400" b="1" dirty="0" err="1" smtClean="0">
-                <a:solidFill>
-                  <a:srgbClr val="660033"/>
-                </a:solidFill>
-                <a:effectLst/>
+              <a:rPr lang="en-US" sz="4400" b="1" dirty="0" err="1">
+                <a:solidFill>
+                  <a:srgbClr val="660033"/>
+                </a:solidFill>
                 <a:latin typeface="Calibri" panose="020F0502020204030204" pitchFamily="34" charset="0"/>
                 <a:ea typeface="微軟正黑體" pitchFamily="34" charset="-120"/>
                 <a:cs typeface="Calibri" panose="020F0502020204030204" pitchFamily="34" charset="0"/>
@@ -6593,11 +6423,10 @@
               <a:t>trút</a:t>
             </a:r>
             <a:r>
-              <a:rPr lang="en-US" sz="4400" b="1" dirty="0" smtClean="0">
-                <a:solidFill>
-                  <a:srgbClr val="660033"/>
-                </a:solidFill>
-                <a:effectLst/>
+              <a:rPr lang="en-US" sz="4400" b="1" dirty="0">
+                <a:solidFill>
+                  <a:srgbClr val="660033"/>
+                </a:solidFill>
                 <a:latin typeface="Calibri" panose="020F0502020204030204" pitchFamily="34" charset="0"/>
                 <a:ea typeface="微軟正黑體" pitchFamily="34" charset="-120"/>
                 <a:cs typeface="Calibri" panose="020F0502020204030204" pitchFamily="34" charset="0"/>
@@ -6609,7 +6438,6 @@
                 <a:solidFill>
                   <a:srgbClr val="660033"/>
                 </a:solidFill>
-                <a:effectLst/>
                 <a:latin typeface="Calibri" panose="020F0502020204030204" pitchFamily="34" charset="0"/>
                 <a:ea typeface="微軟正黑體" pitchFamily="34" charset="-120"/>
                 <a:cs typeface="Calibri" panose="020F0502020204030204" pitchFamily="34" charset="0"/>
@@ -6621,7 +6449,6 @@
                 <a:solidFill>
                   <a:srgbClr val="660033"/>
                 </a:solidFill>
-                <a:effectLst/>
                 <a:latin typeface="Calibri" panose="020F0502020204030204" pitchFamily="34" charset="0"/>
                 <a:ea typeface="微軟正黑體" pitchFamily="34" charset="-120"/>
                 <a:cs typeface="Calibri" panose="020F0502020204030204" pitchFamily="34" charset="0"/>
@@ -6633,7 +6460,6 @@
                 <a:solidFill>
                   <a:srgbClr val="660033"/>
                 </a:solidFill>
-                <a:effectLst/>
                 <a:latin typeface="Calibri" panose="020F0502020204030204" pitchFamily="34" charset="0"/>
                 <a:ea typeface="微軟正黑體" pitchFamily="34" charset="-120"/>
                 <a:cs typeface="Calibri" panose="020F0502020204030204" pitchFamily="34" charset="0"/>
@@ -6644,7 +6470,6 @@
               <a:solidFill>
                 <a:srgbClr val="660033"/>
               </a:solidFill>
-              <a:effectLst/>
               <a:latin typeface="Calibri" panose="020F0502020204030204" pitchFamily="34" charset="0"/>
               <a:ea typeface="微軟正黑體" pitchFamily="34" charset="-120"/>
               <a:cs typeface="Calibri" panose="020F0502020204030204" pitchFamily="34" charset="0"/>
